--- a/examples/nordmark/deck.pptx
+++ b/examples/nordmark/deck.pptx
@@ -344,17 +344,6 @@
         </c:scaling>
         <c:delete val="0"/>
         <c:axPos val="l"/>
-        <c:majorGridlines>
-          <c:spPr>
-            <a:ln w="6350" cap="flat">
-              <a:solidFill>
-                <a:srgbClr val="E3E3E3"/>
-              </a:solidFill>
-              <a:prstDash val="solid"/>
-              <a:round/>
-            </a:ln>
-          </c:spPr>
-        </c:majorGridlines>
         <c:numFmt formatCode="General" sourceLinked="0"/>
         <c:majorTickMark val="out"/>
         <c:minorTickMark val="none"/>
